--- a/lecons/F5/28_F5_M2_L25_Multipurpose_River_Development_Project_in_Cameroon.pptx
+++ b/lecons/F5/28_F5_M2_L25_Multipurpose_River_Development_Project_in_Cameroon.pptx
@@ -13113,7 +13113,7 @@
               <a:buNone/>
             </a:pPr>
             <a:r>
-              <a:rPr lang="en-US" sz="4000" b="1" dirty="0">
+              <a:rPr lang="en-US" sz="3200" b="1" dirty="0">
                 <a:solidFill>
                   <a:srgbClr val="111111"/>
                 </a:solidFill>
@@ -13123,7 +13123,7 @@
               </a:rPr>
               <a:t>Topic: Development Projects and Environmental Management</a:t>
             </a:r>
-            <a:endParaRPr lang="en-US" sz="4000" dirty="0"/>
+            <a:endParaRPr lang="en-US" sz="3200" dirty="0"/>
           </a:p>
           <a:p>
             <a:pPr algn="l" indent="0" marL="0">
@@ -13133,7 +13133,7 @@
               <a:buNone/>
             </a:pPr>
             <a:r>
-              <a:rPr lang="en-US" sz="4000" b="1" dirty="0">
+              <a:rPr lang="en-US" sz="3200" b="1" dirty="0">
                 <a:solidFill>
                   <a:srgbClr val="111111"/>
                 </a:solidFill>
@@ -13143,7 +13143,7 @@
               </a:rPr>
               <a:t>Sub-topic: Development Projects in Cameroon</a:t>
             </a:r>
-            <a:endParaRPr lang="en-US" sz="4000" dirty="0"/>
+            <a:endParaRPr lang="en-US" sz="3200" dirty="0"/>
           </a:p>
           <a:p>
             <a:pPr algn="l" indent="0" marL="0">
@@ -13153,7 +13153,7 @@
               <a:buNone/>
             </a:pPr>
             <a:r>
-              <a:rPr lang="en-US" sz="4000" b="1" dirty="0">
+              <a:rPr lang="en-US" sz="3200" b="1" dirty="0">
                 <a:solidFill>
                   <a:srgbClr val="990011"/>
                 </a:solidFill>
@@ -13163,7 +13163,7 @@
               </a:rPr>
               <a:t>Lesson 25: Multipurpose River Development Project in Cameroon</a:t>
             </a:r>
-            <a:endParaRPr lang="en-US" sz="4000" dirty="0"/>
+            <a:endParaRPr lang="en-US" sz="3200" dirty="0"/>
           </a:p>
         </p:txBody>
       </p:sp>

--- a/lecons/F5/28_F5_M2_L25_Multipurpose_River_Development_Project_in_Cameroon.pptx
+++ b/lecons/F5/28_F5_M2_L25_Multipurpose_River_Development_Project_in_Cameroon.pptx
@@ -57,9 +57,11 @@
     <p:sldId id="305" r:id="rId51"/>
     <p:sldId id="306" r:id="rId52"/>
     <p:sldId id="307" r:id="rId53"/>
+    <p:sldId id="308" r:id="rId54"/>
+    <p:sldId id="309" r:id="rId55"/>
   </p:sldIdLst>
   <p:notesMasterIdLst>
-    <p:notesMasterId r:id="rId54"/>
+    <p:notesMasterId r:id="rId56"/>
   </p:notesMasterIdLst>
   <p:sldSz cx="12192000" cy="6858000"/>
   <p:notesSz cx="6858000" cy="12192000"/>
@@ -3369,7 +3371,7 @@
           <a:p>
             <a:r>
               <a:rPr lang="en-US" dirty="0"/>
-              <a:t>Let us copy Problems and Attempted Solutions. The project faces problems and attempted solutions as follows. On this slide we have Problems and More problems. Write each point on a new line, with the key term first, and explain it in your own words when we revise. When you finish, we go to the next slide.</a:t>
+              <a:t>Let us copy Problems. The Lagdo project faces the following problems. On this slide we have Low water and Silting. Write each point on a new line, with the key term first, and explain it in your own words when we revise. When you finish, we go to the next slide.</a:t>
             </a:r>
             <a:endParaRPr lang="en-US" dirty="0"/>
           </a:p>
@@ -3545,7 +3547,7 @@
           <a:p>
             <a:r>
               <a:rPr lang="en-US" dirty="0"/>
-              <a:t>We continue with Problems and Attempted Solutions. On this slide we have Attempted solutions. Write each point on a new line, with the key term first, and explain it in your own words when we revise.</a:t>
+              <a:t>We continue with Problems. On this slide we have Floods downstream. Write each point on a new line, with the key term first, and explain it in your own words when we revise.</a:t>
             </a:r>
             <a:endParaRPr lang="en-US" dirty="0"/>
           </a:p>
@@ -3633,7 +3635,7 @@
           <a:p>
             <a:r>
               <a:rPr lang="en-US" dirty="0"/>
-              <a:t>Now let us check what you have understood. Question 1: Give two objectives of the Lagdo dam. Answer in your exercise book.</a:t>
+              <a:t>Let us copy Attempted Solutions. The following solutions are attempted. On this slide we have Tree planting and New dams and grid interconnection. Write each point on a new line, with the key term first, and explain it in your own words when we revise. When you finish, we go to the next slide.</a:t>
             </a:r>
             <a:endParaRPr lang="en-US" dirty="0"/>
           </a:p>
@@ -3721,7 +3723,7 @@
           <a:p>
             <a:r>
               <a:rPr lang="en-US" dirty="0"/>
-              <a:t>The expected answer is: electricity and irrigation. If you got it right, well done.</a:t>
+              <a:t>We continue with Attempted Solutions. On this slide we have Flood warnings. Write each point on a new line, with the key term first, and explain it in your own words when we revise.</a:t>
             </a:r>
             <a:endParaRPr lang="en-US" dirty="0"/>
           </a:p>
@@ -3809,7 +3811,7 @@
           <a:p>
             <a:r>
               <a:rPr lang="en-US" dirty="0"/>
-              <a:t>Now let us check what you have understood. Question 2: Give one problem and one solution. Answer in your exercise book.</a:t>
+              <a:t>Now let us check what you have understood. Question 1: Give two objectives of the Lagdo dam. Answer in your exercise book.</a:t>
             </a:r>
             <a:endParaRPr lang="en-US" dirty="0"/>
           </a:p>
@@ -3897,7 +3899,7 @@
           <a:p>
             <a:r>
               <a:rPr lang="en-US" dirty="0"/>
-              <a:t>The expected answer is: power cuts in the dry season; interconnection of power grids. If you got it right, well done.</a:t>
+              <a:t>The expected answer is: electricity and irrigation. If you got it right, well done.</a:t>
             </a:r>
             <a:endParaRPr lang="en-US" dirty="0"/>
           </a:p>
@@ -3985,7 +3987,7 @@
           <a:p>
             <a:r>
               <a:rPr lang="en-US" dirty="0"/>
-              <a:t>For those who need more practice, fill in the blanks in your exercise book. The answers are: number 1, Benue; number 2, hydro-electricity; number 3, Lom Pangar.</a:t>
+              <a:t>Now let us check what you have understood. Question 2: Give one problem and one solution. Answer in your exercise book.</a:t>
             </a:r>
             <a:endParaRPr lang="en-US" dirty="0"/>
           </a:p>
@@ -4073,7 +4075,7 @@
           <a:p>
             <a:r>
               <a:rPr lang="en-US" dirty="0"/>
-              <a:t>For your homework: Explain how the Lagdo dam affects the life of the people of Garoua. We shall correct it at the beginning of our next lesson.</a:t>
+              <a:t>The expected answer is: power cuts in the dry season; interconnection of power grids. If you got it right, well done.</a:t>
             </a:r>
             <a:endParaRPr lang="en-US" dirty="0"/>
           </a:p>
@@ -4161,7 +4163,7 @@
           <a:p>
             <a:r>
               <a:rPr lang="en-US" dirty="0"/>
-              <a:t>Our next lesson will be on Lesson 26: Problems of Waste Management. Thank you for your attention, and see you next time.</a:t>
+              <a:t>For those who need more practice, fill in the blanks in your exercise book. The answers are: number 1, Benue; number 2, hydro-electricity; number 3, Lom Pangar.</a:t>
             </a:r>
             <a:endParaRPr lang="en-US" dirty="0"/>
           </a:p>
@@ -4249,7 +4251,7 @@
           <a:p>
             <a:r>
               <a:rPr lang="en-US" dirty="0"/>
-              <a:t>Let us play the bilingual game. I say a word in English, and you give me the French word. Then we do the reverse.</a:t>
+              <a:t>For your homework: Explain how the Lagdo dam affects the life of the people of Garoua. We shall correct it at the beginning of our next lesson.</a:t>
             </a:r>
             <a:endParaRPr lang="en-US" dirty="0"/>
           </a:p>
@@ -4337,7 +4339,7 @@
           <a:p>
             <a:r>
               <a:rPr lang="en-US" dirty="0"/>
-              <a:t>I record this information in the official logbook of the class after the lesson.</a:t>
+              <a:t>Our next lesson will be on Lesson 26: Problems of Waste Management. Thank you for your attention, and see you next time.</a:t>
             </a:r>
             <a:endParaRPr lang="en-US" dirty="0"/>
           </a:p>
@@ -4513,7 +4515,7 @@
           <a:p>
             <a:r>
               <a:rPr lang="en-US" dirty="0"/>
-              <a:t>I complete the second page of the logbook: the matter taught, the evaluation, the homework and the attendance.</a:t>
+              <a:t>Let us play the bilingual game. I say a word in English, and you give me the French word. Then we do the reverse.</a:t>
             </a:r>
             <a:endParaRPr lang="en-US" dirty="0"/>
           </a:p>
@@ -4601,7 +4603,7 @@
           <a:p>
             <a:r>
               <a:rPr lang="en-US" dirty="0"/>
-              <a:t>This slide is for me, the teacher: it gives the timing of the lesson and what to do if the projector is not available.</a:t>
+              <a:t>I record this information in the official logbook of the class after the lesson.</a:t>
             </a:r>
             <a:endParaRPr lang="en-US" dirty="0"/>
           </a:p>
@@ -4689,7 +4691,7 @@
           <a:p>
             <a:r>
               <a:rPr lang="en-US" dirty="0"/>
-              <a:t>These are the references and picture credits used to prepare this lesson.</a:t>
+              <a:t>I complete the second page of the logbook: the matter taught, the evaluation, the homework and the attendance.</a:t>
             </a:r>
             <a:endParaRPr lang="en-US" dirty="0"/>
           </a:p>
@@ -4713,6 +4715,182 @@
             <a:fld id="{F7021451-1387-4CA6-816F-3879F97B5CBC}" type="slidenum">
               <a:rPr lang="en-US"/>
               <a:t>52</a:t>
+            </a:fld>
+            <a:endParaRPr lang="en-US"/>
+          </a:p>
+        </p:txBody>
+      </p:sp>
+    </p:spTree>
+    <p:extLst>
+      <p:ext uri="{BB962C8B-B14F-4D97-AF65-F5344CB8AC3E}">
+        <p14:creationId xmlns:p14="http://schemas.microsoft.com/office/powerpoint/2010/main" val="1024086991"/>
+      </p:ext>
+    </p:extLst>
+  </p:cSld>
+  <p:clrMapOvr>
+    <a:masterClrMapping/>
+  </p:clrMapOvr>
+</p:notes>
+</file>
+
+<file path=ppt/notesSlides/notesSlide53.xml><?xml version="1.0" encoding="utf-8"?>
+<p:notes xmlns:a="http://schemas.openxmlformats.org/drawingml/2006/main" xmlns:r="http://schemas.openxmlformats.org/officeDocument/2006/relationships" xmlns:p="http://schemas.openxmlformats.org/presentationml/2006/main">
+  <p:cSld>
+    <p:spTree>
+      <p:nvGrpSpPr>
+        <p:cNvPr id="1" name=""/>
+        <p:cNvGrpSpPr/>
+        <p:nvPr/>
+      </p:nvGrpSpPr>
+      <p:grpSpPr>
+        <a:xfrm>
+          <a:off x="0" y="0"/>
+          <a:ext cx="0" cy="0"/>
+          <a:chOff x="0" y="0"/>
+          <a:chExt cx="0" cy="0"/>
+        </a:xfrm>
+      </p:grpSpPr>
+      <p:sp>
+        <p:nvSpPr>
+          <p:cNvPr id="2" name="Slide Image Placeholder 1"/>
+          <p:cNvSpPr>
+            <a:spLocks noGrp="1" noRot="1" noChangeAspect="1"/>
+          </p:cNvSpPr>
+          <p:nvPr>
+            <p:ph type="sldImg"/>
+          </p:nvPr>
+        </p:nvSpPr>
+        <p:spPr/>
+      </p:sp>
+      <p:sp>
+        <p:nvSpPr>
+          <p:cNvPr id="3" name="Notes Placeholder 2"/>
+          <p:cNvSpPr>
+            <a:spLocks noGrp="1"/>
+          </p:cNvSpPr>
+          <p:nvPr>
+            <p:ph type="body" idx="1"/>
+          </p:nvPr>
+        </p:nvSpPr>
+        <p:spPr/>
+        <p:txBody>
+          <a:bodyPr/>
+          <a:lstStyle/>
+          <a:p>
+            <a:r>
+              <a:rPr lang="en-US" dirty="0"/>
+              <a:t>This slide is for me, the teacher: it gives the timing of the lesson and what to do if the projector is not available.</a:t>
+            </a:r>
+            <a:endParaRPr lang="en-US" dirty="0"/>
+          </a:p>
+        </p:txBody>
+      </p:sp>
+      <p:sp>
+        <p:nvSpPr>
+          <p:cNvPr id="4" name="Slide Number Placeholder 3"/>
+          <p:cNvSpPr>
+            <a:spLocks noGrp="1"/>
+          </p:cNvSpPr>
+          <p:nvPr>
+            <p:ph type="sldNum" sz="quarter" idx="10"/>
+          </p:nvPr>
+        </p:nvSpPr>
+        <p:spPr/>
+        <p:txBody>
+          <a:bodyPr/>
+          <a:lstStyle/>
+          <a:p>
+            <a:fld id="{F7021451-1387-4CA6-816F-3879F97B5CBC}" type="slidenum">
+              <a:rPr lang="en-US"/>
+              <a:t>53</a:t>
+            </a:fld>
+            <a:endParaRPr lang="en-US"/>
+          </a:p>
+        </p:txBody>
+      </p:sp>
+    </p:spTree>
+    <p:extLst>
+      <p:ext uri="{BB962C8B-B14F-4D97-AF65-F5344CB8AC3E}">
+        <p14:creationId xmlns:p14="http://schemas.microsoft.com/office/powerpoint/2010/main" val="1024086991"/>
+      </p:ext>
+    </p:extLst>
+  </p:cSld>
+  <p:clrMapOvr>
+    <a:masterClrMapping/>
+  </p:clrMapOvr>
+</p:notes>
+</file>
+
+<file path=ppt/notesSlides/notesSlide54.xml><?xml version="1.0" encoding="utf-8"?>
+<p:notes xmlns:a="http://schemas.openxmlformats.org/drawingml/2006/main" xmlns:r="http://schemas.openxmlformats.org/officeDocument/2006/relationships" xmlns:p="http://schemas.openxmlformats.org/presentationml/2006/main">
+  <p:cSld>
+    <p:spTree>
+      <p:nvGrpSpPr>
+        <p:cNvPr id="1" name=""/>
+        <p:cNvGrpSpPr/>
+        <p:nvPr/>
+      </p:nvGrpSpPr>
+      <p:grpSpPr>
+        <a:xfrm>
+          <a:off x="0" y="0"/>
+          <a:ext cx="0" cy="0"/>
+          <a:chOff x="0" y="0"/>
+          <a:chExt cx="0" cy="0"/>
+        </a:xfrm>
+      </p:grpSpPr>
+      <p:sp>
+        <p:nvSpPr>
+          <p:cNvPr id="2" name="Slide Image Placeholder 1"/>
+          <p:cNvSpPr>
+            <a:spLocks noGrp="1" noRot="1" noChangeAspect="1"/>
+          </p:cNvSpPr>
+          <p:nvPr>
+            <p:ph type="sldImg"/>
+          </p:nvPr>
+        </p:nvSpPr>
+        <p:spPr/>
+      </p:sp>
+      <p:sp>
+        <p:nvSpPr>
+          <p:cNvPr id="3" name="Notes Placeholder 2"/>
+          <p:cNvSpPr>
+            <a:spLocks noGrp="1"/>
+          </p:cNvSpPr>
+          <p:nvPr>
+            <p:ph type="body" idx="1"/>
+          </p:nvPr>
+        </p:nvSpPr>
+        <p:spPr/>
+        <p:txBody>
+          <a:bodyPr/>
+          <a:lstStyle/>
+          <a:p>
+            <a:r>
+              <a:rPr lang="en-US" dirty="0"/>
+              <a:t>These are the references and picture credits used to prepare this lesson.</a:t>
+            </a:r>
+            <a:endParaRPr lang="en-US" dirty="0"/>
+          </a:p>
+        </p:txBody>
+      </p:sp>
+      <p:sp>
+        <p:nvSpPr>
+          <p:cNvPr id="4" name="Slide Number Placeholder 3"/>
+          <p:cNvSpPr>
+            <a:spLocks noGrp="1"/>
+          </p:cNvSpPr>
+          <p:nvPr>
+            <p:ph type="sldNum" sz="quarter" idx="10"/>
+          </p:nvPr>
+        </p:nvSpPr>
+        <p:spPr/>
+        <p:txBody>
+          <a:bodyPr/>
+          <a:lstStyle/>
+          <a:p>
+            <a:fld id="{F7021451-1387-4CA6-816F-3879F97B5CBC}" type="slidenum">
+              <a:rPr lang="en-US"/>
+              <a:t>54</a:t>
             </a:fld>
             <a:endParaRPr lang="en-US"/>
           </a:p>
@@ -14568,7 +14746,7 @@
         <p:spPr>
           <a:xfrm>
             <a:off x="0" y="658368"/>
-            <a:ext cx="2468880" cy="5833872"/>
+            <a:ext cx="5120640" cy="5833872"/>
           </a:xfrm>
           <a:prstGeom prst="rect">
             <a:avLst/>
@@ -14583,8 +14761,8 @@
         </p:nvSpPr>
         <p:spPr>
           <a:xfrm>
-            <a:off x="2697480" y="1005840"/>
-            <a:ext cx="9174175" cy="731520"/>
+            <a:off x="5349240" y="1005840"/>
+            <a:ext cx="6522415" cy="731520"/>
           </a:xfrm>
           <a:prstGeom prst="rect">
             <a:avLst/>
@@ -14624,8 +14802,47 @@
         </p:nvSpPr>
         <p:spPr>
           <a:xfrm>
-            <a:off x="2697480" y="1783080"/>
-            <a:ext cx="9174175" cy="4663440"/>
+            <a:off x="5349240" y="1737360"/>
+            <a:ext cx="6522415" cy="457200"/>
+          </a:xfrm>
+          <a:prstGeom prst="rect">
+            <a:avLst/>
+          </a:prstGeom>
+          <a:noFill/>
+          <a:ln/>
+        </p:spPr>
+        <p:txBody>
+          <a:bodyPr wrap="square" lIns="0" tIns="0" rIns="0" bIns="0" rtlCol="0" anchor="ctr"/>
+          <a:lstStyle/>
+          <a:p>
+            <a:pPr algn="l" indent="0" marL="0">
+              <a:buNone/>
+            </a:pPr>
+            <a:r>
+              <a:rPr lang="en-US" sz="3200" b="1" dirty="0">
+                <a:solidFill>
+                  <a:srgbClr val="990011"/>
+                </a:solidFill>
+                <a:latin typeface="Times New Roman" pitchFamily="34" charset="0"/>
+                <a:ea typeface="Times New Roman" pitchFamily="34" charset="-122"/>
+                <a:cs typeface="Times New Roman" pitchFamily="34" charset="-120"/>
+              </a:rPr>
+              <a:t>A) Problems</a:t>
+            </a:r>
+            <a:endParaRPr lang="en-US" sz="3200" dirty="0"/>
+          </a:p>
+        </p:txBody>
+      </p:sp>
+      <p:sp>
+        <p:nvSpPr>
+          <p:cNvPr id="6" name="Text 3"/>
+          <p:cNvSpPr/>
+          <p:nvPr/>
+        </p:nvSpPr>
+        <p:spPr>
+          <a:xfrm>
+            <a:off x="5349240" y="2240280"/>
+            <a:ext cx="6522415" cy="4206240"/>
           </a:xfrm>
           <a:prstGeom prst="rect">
             <a:avLst/>
@@ -14652,7 +14869,7 @@
                 <a:ea typeface="Times New Roman" pitchFamily="34" charset="-122"/>
                 <a:cs typeface="Times New Roman" pitchFamily="34" charset="-120"/>
               </a:rPr>
-              <a:t>The project faces problems and attempted solutions as follows:</a:t>
+              <a:t>The Lagdo project faces the following problems:</a:t>
             </a:r>
             <a:endParaRPr lang="en-US" sz="4000" dirty="0"/>
           </a:p>
@@ -14672,7 +14889,7 @@
                 <a:ea typeface="Times New Roman" pitchFamily="34" charset="-122"/>
                 <a:cs typeface="Times New Roman" pitchFamily="34" charset="-120"/>
               </a:rPr>
-              <a:t>Problems: </a:t>
+              <a:t>Low water: </a:t>
             </a:r>
             <a:pPr algn="l" indent="0" marL="0">
               <a:spcAft>
@@ -14689,7 +14906,7 @@
                 <a:ea typeface="Times New Roman" pitchFamily="34" charset="-122"/>
                 <a:cs typeface="Times New Roman" pitchFamily="34" charset="-120"/>
               </a:rPr>
-              <a:t>Low water in the dry season causes power cuts, and the lake is silting.</a:t>
+              <a:t>In the dry season, the lake is low and power cuts occur.</a:t>
             </a:r>
             <a:endParaRPr lang="en-US" sz="4000" dirty="0"/>
           </a:p>
@@ -14709,7 +14926,7 @@
                 <a:ea typeface="Times New Roman" pitchFamily="34" charset="-122"/>
                 <a:cs typeface="Times New Roman" pitchFamily="34" charset="-120"/>
               </a:rPr>
-              <a:t>More problems: </a:t>
+              <a:t>Silting: </a:t>
             </a:r>
             <a:pPr algn="l" indent="0" marL="0">
               <a:spcAft>
@@ -14726,7 +14943,7 @@
                 <a:ea typeface="Times New Roman" pitchFamily="34" charset="-122"/>
                 <a:cs typeface="Times New Roman" pitchFamily="34" charset="-120"/>
               </a:rPr>
-              <a:t>Water releases can flood villages downstream, as in 2012.</a:t>
+              <a:t>Mud fills the lake.</a:t>
             </a:r>
             <a:endParaRPr lang="en-US" sz="4000" dirty="0"/>
           </a:p>
@@ -15142,7 +15359,7 @@
                 <a:ea typeface="Times New Roman" pitchFamily="34" charset="-122"/>
                 <a:cs typeface="Times New Roman" pitchFamily="34" charset="-120"/>
               </a:rPr>
-              <a:t>3. Problems and Attempted Solutions (continued)</a:t>
+              <a:t>3. Problems and Attempted Solutions</a:t>
             </a:r>
             <a:endParaRPr lang="en-US" sz="3600" dirty="0"/>
           </a:p>
@@ -15156,8 +15373,47 @@
         </p:nvSpPr>
         <p:spPr>
           <a:xfrm>
-            <a:off x="5349240" y="1783080"/>
-            <a:ext cx="6522415" cy="4663440"/>
+            <a:off x="5349240" y="1737360"/>
+            <a:ext cx="6522415" cy="457200"/>
+          </a:xfrm>
+          <a:prstGeom prst="rect">
+            <a:avLst/>
+          </a:prstGeom>
+          <a:noFill/>
+          <a:ln/>
+        </p:spPr>
+        <p:txBody>
+          <a:bodyPr wrap="square" lIns="0" tIns="0" rIns="0" bIns="0" rtlCol="0" anchor="ctr"/>
+          <a:lstStyle/>
+          <a:p>
+            <a:pPr algn="l" indent="0" marL="0">
+              <a:buNone/>
+            </a:pPr>
+            <a:r>
+              <a:rPr lang="en-US" sz="3200" b="1" dirty="0">
+                <a:solidFill>
+                  <a:srgbClr val="990011"/>
+                </a:solidFill>
+                <a:latin typeface="Times New Roman" pitchFamily="34" charset="0"/>
+                <a:ea typeface="Times New Roman" pitchFamily="34" charset="-122"/>
+                <a:cs typeface="Times New Roman" pitchFamily="34" charset="-120"/>
+              </a:rPr>
+              <a:t>A) Problems (continued)</a:t>
+            </a:r>
+            <a:endParaRPr lang="en-US" sz="3200" dirty="0"/>
+          </a:p>
+        </p:txBody>
+      </p:sp>
+      <p:sp>
+        <p:nvSpPr>
+          <p:cNvPr id="6" name="Text 3"/>
+          <p:cNvSpPr/>
+          <p:nvPr/>
+        </p:nvSpPr>
+        <p:spPr>
+          <a:xfrm>
+            <a:off x="5349240" y="2240280"/>
+            <a:ext cx="6522415" cy="4206240"/>
           </a:xfrm>
           <a:prstGeom prst="rect">
             <a:avLst/>
@@ -15184,7 +15440,7 @@
                 <a:ea typeface="Times New Roman" pitchFamily="34" charset="-122"/>
                 <a:cs typeface="Times New Roman" pitchFamily="34" charset="-120"/>
               </a:rPr>
-              <a:t>Attempted solutions: </a:t>
+              <a:t>Floods downstream: </a:t>
             </a:r>
             <a:pPr algn="l" indent="0" marL="0">
               <a:spcAft>
@@ -15201,7 +15457,7 @@
                 <a:ea typeface="Times New Roman" pitchFamily="34" charset="-122"/>
                 <a:cs typeface="Times New Roman" pitchFamily="34" charset="-120"/>
               </a:rPr>
-              <a:t>Tree planting, new dams, grid interconnection and flood warnings are used.</a:t>
+              <a:t>Water releases can flood villages, as in 2012.</a:t>
             </a:r>
             <a:endParaRPr lang="en-US" sz="4000" dirty="0"/>
           </a:p>
@@ -15313,7 +15569,7 @@
                 <a:ea typeface="Calibri" pitchFamily="34" charset="-122"/>
                 <a:cs typeface="Calibri" pitchFamily="34" charset="-120"/>
               </a:rPr>
-              <a:t>FORMATIVE EVALUATION</a:t>
+              <a:t>BOARD SUMMARY</a:t>
             </a:r>
             <a:endParaRPr lang="en-US" sz="1400" dirty="0"/>
           </a:p>
@@ -15336,7 +15592,7 @@
         <p:spPr>
           <a:xfrm>
             <a:off x="0" y="658368"/>
-            <a:ext cx="5120640" cy="5833872"/>
+            <a:ext cx="2468880" cy="5833872"/>
           </a:xfrm>
           <a:prstGeom prst="rect">
             <a:avLst/>
@@ -15351,8 +15607,8 @@
         </p:nvSpPr>
         <p:spPr>
           <a:xfrm>
-            <a:off x="5349240" y="1005840"/>
-            <a:ext cx="6522415" cy="731520"/>
+            <a:off x="2697480" y="1005840"/>
+            <a:ext cx="9174175" cy="731520"/>
           </a:xfrm>
           <a:prstGeom prst="rect">
             <a:avLst/>
@@ -15378,7 +15634,7 @@
                 <a:ea typeface="Times New Roman" pitchFamily="34" charset="-122"/>
                 <a:cs typeface="Times New Roman" pitchFamily="34" charset="-120"/>
               </a:rPr>
-              <a:t>Evaluation 1</a:t>
+              <a:t>3. Problems and Attempted Solutions</a:t>
             </a:r>
             <a:endParaRPr lang="en-US" sz="3600" dirty="0"/>
           </a:p>
@@ -15392,8 +15648,47 @@
         </p:nvSpPr>
         <p:spPr>
           <a:xfrm>
-            <a:off x="5349240" y="1783080"/>
-            <a:ext cx="6522415" cy="4663440"/>
+            <a:off x="2697480" y="1737360"/>
+            <a:ext cx="9174175" cy="457200"/>
+          </a:xfrm>
+          <a:prstGeom prst="rect">
+            <a:avLst/>
+          </a:prstGeom>
+          <a:noFill/>
+          <a:ln/>
+        </p:spPr>
+        <p:txBody>
+          <a:bodyPr wrap="square" lIns="0" tIns="0" rIns="0" bIns="0" rtlCol="0" anchor="ctr"/>
+          <a:lstStyle/>
+          <a:p>
+            <a:pPr algn="l" indent="0" marL="0">
+              <a:buNone/>
+            </a:pPr>
+            <a:r>
+              <a:rPr lang="en-US" sz="3200" b="1" dirty="0">
+                <a:solidFill>
+                  <a:srgbClr val="990011"/>
+                </a:solidFill>
+                <a:latin typeface="Times New Roman" pitchFamily="34" charset="0"/>
+                <a:ea typeface="Times New Roman" pitchFamily="34" charset="-122"/>
+                <a:cs typeface="Times New Roman" pitchFamily="34" charset="-120"/>
+              </a:rPr>
+              <a:t>B) Attempted Solutions</a:t>
+            </a:r>
+            <a:endParaRPr lang="en-US" sz="3200" dirty="0"/>
+          </a:p>
+        </p:txBody>
+      </p:sp>
+      <p:sp>
+        <p:nvSpPr>
+          <p:cNvPr id="6" name="Text 3"/>
+          <p:cNvSpPr/>
+          <p:nvPr/>
+        </p:nvSpPr>
+        <p:spPr>
+          <a:xfrm>
+            <a:off x="2697480" y="2240280"/>
+            <a:ext cx="9174175" cy="4206240"/>
           </a:xfrm>
           <a:prstGeom prst="rect">
             <a:avLst/>
@@ -15412,7 +15707,7 @@
               <a:buNone/>
             </a:pPr>
             <a:r>
-              <a:rPr lang="en-US" sz="4000" dirty="0">
+              <a:rPr lang="en-US" sz="4000" i="1" dirty="0">
                 <a:solidFill>
                   <a:srgbClr val="111111"/>
                 </a:solidFill>
@@ -15420,7 +15715,81 @@
                 <a:ea typeface="Times New Roman" pitchFamily="34" charset="-122"/>
                 <a:cs typeface="Times New Roman" pitchFamily="34" charset="-120"/>
               </a:rPr>
-              <a:t>Give two objectives of the Lagdo dam.</a:t>
+              <a:t>The following solutions are attempted:</a:t>
+            </a:r>
+            <a:endParaRPr lang="en-US" sz="4000" dirty="0"/>
+          </a:p>
+          <a:p>
+            <a:pPr algn="l" indent="0" marL="0">
+              <a:spcAft>
+                <a:spcPts val="800"/>
+              </a:spcAft>
+              <a:buNone/>
+            </a:pPr>
+            <a:r>
+              <a:rPr lang="en-US" sz="4000" b="1" dirty="0">
+                <a:solidFill>
+                  <a:srgbClr val="111111"/>
+                </a:solidFill>
+                <a:latin typeface="Times New Roman" pitchFamily="34" charset="0"/>
+                <a:ea typeface="Times New Roman" pitchFamily="34" charset="-122"/>
+                <a:cs typeface="Times New Roman" pitchFamily="34" charset="-120"/>
+              </a:rPr>
+              <a:t>Tree planting: </a:t>
+            </a:r>
+            <a:pPr algn="l" indent="0" marL="0">
+              <a:spcAft>
+                <a:spcPts val="800"/>
+              </a:spcAft>
+              <a:buNone/>
+            </a:pPr>
+            <a:r>
+              <a:rPr lang="en-US" sz="4000" dirty="0">
+                <a:solidFill>
+                  <a:srgbClr val="111111"/>
+                </a:solidFill>
+                <a:latin typeface="Times New Roman" pitchFamily="34" charset="0"/>
+                <a:ea typeface="Times New Roman" pitchFamily="34" charset="-122"/>
+                <a:cs typeface="Times New Roman" pitchFamily="34" charset="-120"/>
+              </a:rPr>
+              <a:t>Trees reduce erosion and silting.</a:t>
+            </a:r>
+            <a:endParaRPr lang="en-US" sz="4000" dirty="0"/>
+          </a:p>
+          <a:p>
+            <a:pPr algn="l" indent="0" marL="0">
+              <a:spcAft>
+                <a:spcPts val="800"/>
+              </a:spcAft>
+              <a:buNone/>
+            </a:pPr>
+            <a:r>
+              <a:rPr lang="en-US" sz="4000" b="1" dirty="0">
+                <a:solidFill>
+                  <a:srgbClr val="111111"/>
+                </a:solidFill>
+                <a:latin typeface="Times New Roman" pitchFamily="34" charset="0"/>
+                <a:ea typeface="Times New Roman" pitchFamily="34" charset="-122"/>
+                <a:cs typeface="Times New Roman" pitchFamily="34" charset="-120"/>
+              </a:rPr>
+              <a:t>New dams and grid interconnection: </a:t>
+            </a:r>
+            <a:pPr algn="l" indent="0" marL="0">
+              <a:spcAft>
+                <a:spcPts val="800"/>
+              </a:spcAft>
+              <a:buNone/>
+            </a:pPr>
+            <a:r>
+              <a:rPr lang="en-US" sz="4000" dirty="0">
+                <a:solidFill>
+                  <a:srgbClr val="111111"/>
+                </a:solidFill>
+                <a:latin typeface="Times New Roman" pitchFamily="34" charset="0"/>
+                <a:ea typeface="Times New Roman" pitchFamily="34" charset="-122"/>
+                <a:cs typeface="Times New Roman" pitchFamily="34" charset="-120"/>
+              </a:rPr>
+              <a:t>They bring more electricity to the north.</a:t>
             </a:r>
             <a:endParaRPr lang="en-US" sz="4000" dirty="0"/>
           </a:p>
@@ -15532,7 +15901,7 @@
                 <a:ea typeface="Calibri" pitchFamily="34" charset="-122"/>
                 <a:cs typeface="Calibri" pitchFamily="34" charset="-120"/>
               </a:rPr>
-              <a:t>FORMATIVE EVALUATION</a:t>
+              <a:t>BOARD SUMMARY</a:t>
             </a:r>
             <a:endParaRPr lang="en-US" sz="1400" dirty="0"/>
           </a:p>
@@ -15597,7 +15966,7 @@
                 <a:ea typeface="Times New Roman" pitchFamily="34" charset="-122"/>
                 <a:cs typeface="Times New Roman" pitchFamily="34" charset="-120"/>
               </a:rPr>
-              <a:t>Expected Answer</a:t>
+              <a:t>3. Problems and Attempted Solutions</a:t>
             </a:r>
             <a:endParaRPr lang="en-US" sz="3600" dirty="0"/>
           </a:p>
@@ -15611,8 +15980,47 @@
         </p:nvSpPr>
         <p:spPr>
           <a:xfrm>
-            <a:off x="5349240" y="1783080"/>
-            <a:ext cx="6522415" cy="4663440"/>
+            <a:off x="5349240" y="1737360"/>
+            <a:ext cx="6522415" cy="457200"/>
+          </a:xfrm>
+          <a:prstGeom prst="rect">
+            <a:avLst/>
+          </a:prstGeom>
+          <a:noFill/>
+          <a:ln/>
+        </p:spPr>
+        <p:txBody>
+          <a:bodyPr wrap="square" lIns="0" tIns="0" rIns="0" bIns="0" rtlCol="0" anchor="ctr"/>
+          <a:lstStyle/>
+          <a:p>
+            <a:pPr algn="l" indent="0" marL="0">
+              <a:buNone/>
+            </a:pPr>
+            <a:r>
+              <a:rPr lang="en-US" sz="3000" b="1" dirty="0">
+                <a:solidFill>
+                  <a:srgbClr val="990011"/>
+                </a:solidFill>
+                <a:latin typeface="Times New Roman" pitchFamily="34" charset="0"/>
+                <a:ea typeface="Times New Roman" pitchFamily="34" charset="-122"/>
+                <a:cs typeface="Times New Roman" pitchFamily="34" charset="-120"/>
+              </a:rPr>
+              <a:t>B) Attempted Solutions (continued)</a:t>
+            </a:r>
+            <a:endParaRPr lang="en-US" sz="3000" dirty="0"/>
+          </a:p>
+        </p:txBody>
+      </p:sp>
+      <p:sp>
+        <p:nvSpPr>
+          <p:cNvPr id="6" name="Text 3"/>
+          <p:cNvSpPr/>
+          <p:nvPr/>
+        </p:nvSpPr>
+        <p:spPr>
+          <a:xfrm>
+            <a:off x="5349240" y="2240280"/>
+            <a:ext cx="6522415" cy="4206240"/>
           </a:xfrm>
           <a:prstGeom prst="rect">
             <a:avLst/>
@@ -15631,7 +16039,7 @@
               <a:buNone/>
             </a:pPr>
             <a:r>
-              <a:rPr lang="en-US" sz="4000" dirty="0">
+              <a:rPr lang="en-US" sz="4000" b="1" dirty="0">
                 <a:solidFill>
                   <a:srgbClr val="111111"/>
                 </a:solidFill>
@@ -15639,7 +16047,24 @@
                 <a:ea typeface="Times New Roman" pitchFamily="34" charset="-122"/>
                 <a:cs typeface="Times New Roman" pitchFamily="34" charset="-120"/>
               </a:rPr>
-              <a:t>Electricity and irrigation.</a:t>
+              <a:t>Flood warnings: </a:t>
+            </a:r>
+            <a:pPr algn="l" indent="0" marL="0">
+              <a:spcAft>
+                <a:spcPts val="800"/>
+              </a:spcAft>
+              <a:buNone/>
+            </a:pPr>
+            <a:r>
+              <a:rPr lang="en-US" sz="4000" dirty="0">
+                <a:solidFill>
+                  <a:srgbClr val="111111"/>
+                </a:solidFill>
+                <a:latin typeface="Times New Roman" pitchFamily="34" charset="0"/>
+                <a:ea typeface="Times New Roman" pitchFamily="34" charset="-122"/>
+                <a:cs typeface="Times New Roman" pitchFamily="34" charset="-120"/>
+              </a:rPr>
+              <a:t>Villagers are warned before water is released.</a:t>
             </a:r>
             <a:endParaRPr lang="en-US" sz="4000" dirty="0"/>
           </a:p>
@@ -15816,7 +16241,7 @@
                 <a:ea typeface="Times New Roman" pitchFamily="34" charset="-122"/>
                 <a:cs typeface="Times New Roman" pitchFamily="34" charset="-120"/>
               </a:rPr>
-              <a:t>Evaluation 2</a:t>
+              <a:t>Evaluation 1</a:t>
             </a:r>
             <a:endParaRPr lang="en-US" sz="3600" dirty="0"/>
           </a:p>
@@ -15858,7 +16283,7 @@
                 <a:ea typeface="Times New Roman" pitchFamily="34" charset="-122"/>
                 <a:cs typeface="Times New Roman" pitchFamily="34" charset="-120"/>
               </a:rPr>
-              <a:t>Give one problem and one solution.</a:t>
+              <a:t>Give two objectives of the Lagdo dam.</a:t>
             </a:r>
             <a:endParaRPr lang="en-US" sz="4000" dirty="0"/>
           </a:p>
@@ -16077,7 +16502,7 @@
                 <a:ea typeface="Times New Roman" pitchFamily="34" charset="-122"/>
                 <a:cs typeface="Times New Roman" pitchFamily="34" charset="-120"/>
               </a:rPr>
-              <a:t>Power cuts in the dry season; interconnection of power grids.</a:t>
+              <a:t>Electricity and irrigation.</a:t>
             </a:r>
             <a:endParaRPr lang="en-US" sz="4000" dirty="0"/>
           </a:p>
@@ -16189,7 +16614,7 @@
                 <a:ea typeface="Calibri" pitchFamily="34" charset="-122"/>
                 <a:cs typeface="Calibri" pitchFamily="34" charset="-120"/>
               </a:rPr>
-              <a:t>REMEDIATION</a:t>
+              <a:t>FORMATIVE EVALUATION</a:t>
             </a:r>
             <a:endParaRPr lang="en-US" sz="1400" dirty="0"/>
           </a:p>
@@ -16212,7 +16637,7 @@
         <p:spPr>
           <a:xfrm>
             <a:off x="0" y="658368"/>
-            <a:ext cx="2468880" cy="5833872"/>
+            <a:ext cx="5120640" cy="5833872"/>
           </a:xfrm>
           <a:prstGeom prst="rect">
             <a:avLst/>
@@ -16227,8 +16652,8 @@
         </p:nvSpPr>
         <p:spPr>
           <a:xfrm>
-            <a:off x="2697480" y="1005840"/>
-            <a:ext cx="9174175" cy="731520"/>
+            <a:off x="5349240" y="1005840"/>
+            <a:ext cx="6522415" cy="731520"/>
           </a:xfrm>
           <a:prstGeom prst="rect">
             <a:avLst/>
@@ -16254,7 +16679,7 @@
                 <a:ea typeface="Times New Roman" pitchFamily="34" charset="-122"/>
                 <a:cs typeface="Times New Roman" pitchFamily="34" charset="-120"/>
               </a:rPr>
-              <a:t>Remediation</a:t>
+              <a:t>Evaluation 2</a:t>
             </a:r>
             <a:endParaRPr lang="en-US" sz="3600" dirty="0"/>
           </a:p>
@@ -16268,8 +16693,8 @@
         </p:nvSpPr>
         <p:spPr>
           <a:xfrm>
-            <a:off x="2697480" y="1783080"/>
-            <a:ext cx="9174175" cy="4663440"/>
+            <a:off x="5349240" y="1783080"/>
+            <a:ext cx="6522415" cy="4663440"/>
           </a:xfrm>
           <a:prstGeom prst="rect">
             <a:avLst/>
@@ -16288,7 +16713,7 @@
               <a:buNone/>
             </a:pPr>
             <a:r>
-              <a:rPr lang="en-US" sz="4000" b="1" dirty="0">
+              <a:rPr lang="en-US" sz="4000" dirty="0">
                 <a:solidFill>
                   <a:srgbClr val="111111"/>
                 </a:solidFill>
@@ -16296,73 +16721,7 @@
                 <a:ea typeface="Times New Roman" pitchFamily="34" charset="-122"/>
                 <a:cs typeface="Times New Roman" pitchFamily="34" charset="-120"/>
               </a:rPr>
-              <a:t>Fill in the blanks:</a:t>
-            </a:r>
-            <a:endParaRPr lang="en-US" sz="4000" dirty="0"/>
-          </a:p>
-          <a:p>
-            <a:pPr algn="l" marL="342900" indent="-342900">
-              <a:spcAft>
-                <a:spcPts val="800"/>
-              </a:spcAft>
-              <a:buSzPct val="100000"/>
-              <a:buFont typeface="+mj-lt"/>
-              <a:buAutoNum type="arabicPeriod" startAt="1"/>
-            </a:pPr>
-            <a:r>
-              <a:rPr lang="en-US" sz="4000" dirty="0">
-                <a:solidFill>
-                  <a:srgbClr val="111111"/>
-                </a:solidFill>
-                <a:latin typeface="Times New Roman" pitchFamily="34" charset="0"/>
-                <a:ea typeface="Times New Roman" pitchFamily="34" charset="-122"/>
-                <a:cs typeface="Times New Roman" pitchFamily="34" charset="-120"/>
-              </a:rPr>
-              <a:t>The Lagdo dam is on the ______ River.</a:t>
-            </a:r>
-            <a:endParaRPr lang="en-US" sz="4000" dirty="0"/>
-          </a:p>
-          <a:p>
-            <a:pPr algn="l" marL="342900" indent="-342900">
-              <a:spcAft>
-                <a:spcPts val="800"/>
-              </a:spcAft>
-              <a:buSzPct val="100000"/>
-              <a:buFont typeface="+mj-lt"/>
-              <a:buAutoNum type="arabicPeriod" startAt="1"/>
-            </a:pPr>
-            <a:r>
-              <a:rPr lang="en-US" sz="4000" dirty="0">
-                <a:solidFill>
-                  <a:srgbClr val="111111"/>
-                </a:solidFill>
-                <a:latin typeface="Times New Roman" pitchFamily="34" charset="0"/>
-                <a:ea typeface="Times New Roman" pitchFamily="34" charset="-122"/>
-                <a:cs typeface="Times New Roman" pitchFamily="34" charset="-120"/>
-              </a:rPr>
-              <a:t>The dam produces ______ for the North.</a:t>
-            </a:r>
-            <a:endParaRPr lang="en-US" sz="4000" dirty="0"/>
-          </a:p>
-          <a:p>
-            <a:pPr algn="l" marL="342900" indent="-342900">
-              <a:spcAft>
-                <a:spcPts val="800"/>
-              </a:spcAft>
-              <a:buSzPct val="100000"/>
-              <a:buFont typeface="+mj-lt"/>
-              <a:buAutoNum type="arabicPeriod" startAt="1"/>
-            </a:pPr>
-            <a:r>
-              <a:rPr lang="en-US" sz="4000" dirty="0">
-                <a:solidFill>
-                  <a:srgbClr val="111111"/>
-                </a:solidFill>
-                <a:latin typeface="Times New Roman" pitchFamily="34" charset="0"/>
-                <a:ea typeface="Times New Roman" pitchFamily="34" charset="-122"/>
-                <a:cs typeface="Times New Roman" pitchFamily="34" charset="-120"/>
-              </a:rPr>
-              <a:t>A dam on the Lom in the East is ______.</a:t>
+              <a:t>Give one problem and one solution.</a:t>
             </a:r>
             <a:endParaRPr lang="en-US" sz="4000" dirty="0"/>
           </a:p>
@@ -16474,7 +16833,7 @@
                 <a:ea typeface="Calibri" pitchFamily="34" charset="-122"/>
                 <a:cs typeface="Calibri" pitchFamily="34" charset="-120"/>
               </a:rPr>
-              <a:t>HOMEWORK</a:t>
+              <a:t>FORMATIVE EVALUATION</a:t>
             </a:r>
             <a:endParaRPr lang="en-US" sz="1400" dirty="0"/>
           </a:p>
@@ -16539,7 +16898,7 @@
                 <a:ea typeface="Times New Roman" pitchFamily="34" charset="-122"/>
                 <a:cs typeface="Times New Roman" pitchFamily="34" charset="-120"/>
               </a:rPr>
-              <a:t>Homework</a:t>
+              <a:t>Expected Answer</a:t>
             </a:r>
             <a:endParaRPr lang="en-US" sz="3600" dirty="0"/>
           </a:p>
@@ -16581,7 +16940,7 @@
                 <a:ea typeface="Times New Roman" pitchFamily="34" charset="-122"/>
                 <a:cs typeface="Times New Roman" pitchFamily="34" charset="-120"/>
               </a:rPr>
-              <a:t>Explain how the Lagdo dam affects the life of the people of Garoua.</a:t>
+              <a:t>Power cuts in the dry season; interconnection of power grids.</a:t>
             </a:r>
             <a:endParaRPr lang="en-US" sz="4000" dirty="0"/>
           </a:p>
@@ -16693,7 +17052,7 @@
                 <a:ea typeface="Calibri" pitchFamily="34" charset="-122"/>
                 <a:cs typeface="Calibri" pitchFamily="34" charset="-120"/>
               </a:rPr>
-              <a:t>NEXT LESSON</a:t>
+              <a:t>REMEDIATION</a:t>
             </a:r>
             <a:endParaRPr lang="en-US" sz="1400" dirty="0"/>
           </a:p>
@@ -16716,7 +17075,7 @@
         <p:spPr>
           <a:xfrm>
             <a:off x="0" y="658368"/>
-            <a:ext cx="5120640" cy="5833872"/>
+            <a:ext cx="2468880" cy="5833872"/>
           </a:xfrm>
           <a:prstGeom prst="rect">
             <a:avLst/>
@@ -16731,8 +17090,8 @@
         </p:nvSpPr>
         <p:spPr>
           <a:xfrm>
-            <a:off x="5349240" y="1005840"/>
-            <a:ext cx="6522415" cy="731520"/>
+            <a:off x="2697480" y="1005840"/>
+            <a:ext cx="9174175" cy="731520"/>
           </a:xfrm>
           <a:prstGeom prst="rect">
             <a:avLst/>
@@ -16758,7 +17117,7 @@
                 <a:ea typeface="Times New Roman" pitchFamily="34" charset="-122"/>
                 <a:cs typeface="Times New Roman" pitchFamily="34" charset="-120"/>
               </a:rPr>
-              <a:t>Next Lesson</a:t>
+              <a:t>Remediation</a:t>
             </a:r>
             <a:endParaRPr lang="en-US" sz="3600" dirty="0"/>
           </a:p>
@@ -16772,8 +17131,8 @@
         </p:nvSpPr>
         <p:spPr>
           <a:xfrm>
-            <a:off x="5349240" y="1783080"/>
-            <a:ext cx="6522415" cy="4663440"/>
+            <a:off x="2697480" y="1783080"/>
+            <a:ext cx="9174175" cy="4663440"/>
           </a:xfrm>
           <a:prstGeom prst="rect">
             <a:avLst/>
@@ -16782,10 +17141,10 @@
           <a:ln/>
         </p:spPr>
         <p:txBody>
-          <a:bodyPr wrap="square" lIns="0" tIns="0" rIns="0" bIns="0" rtlCol="0" anchor="ctr"/>
-          <a:lstStyle/>
-          <a:p>
-            <a:pPr algn="ctr" indent="0" marL="0">
+          <a:bodyPr wrap="square" lIns="0" tIns="0" rIns="0" bIns="0" rtlCol="0" anchor="t"/>
+          <a:lstStyle/>
+          <a:p>
+            <a:pPr algn="l" indent="0" marL="0">
               <a:spcAft>
                 <a:spcPts val="800"/>
               </a:spcAft>
@@ -16800,27 +17159,73 @@
                 <a:ea typeface="Times New Roman" pitchFamily="34" charset="-122"/>
                 <a:cs typeface="Times New Roman" pitchFamily="34" charset="-120"/>
               </a:rPr>
-              <a:t>Our next lesson will be on:</a:t>
+              <a:t>Fill in the blanks:</a:t>
             </a:r>
             <a:endParaRPr lang="en-US" sz="4000" dirty="0"/>
           </a:p>
           <a:p>
-            <a:pPr algn="ctr" indent="0" marL="0">
+            <a:pPr algn="l" marL="342900" indent="-342900">
               <a:spcAft>
                 <a:spcPts val="800"/>
               </a:spcAft>
-              <a:buNone/>
+              <a:buSzPct val="100000"/>
+              <a:buFont typeface="+mj-lt"/>
+              <a:buAutoNum type="arabicPeriod" startAt="1"/>
             </a:pPr>
             <a:r>
-              <a:rPr lang="en-US" sz="4000" b="1" dirty="0">
-                <a:solidFill>
-                  <a:srgbClr val="990011"/>
+              <a:rPr lang="en-US" sz="4000" dirty="0">
+                <a:solidFill>
+                  <a:srgbClr val="111111"/>
                 </a:solidFill>
                 <a:latin typeface="Times New Roman" pitchFamily="34" charset="0"/>
                 <a:ea typeface="Times New Roman" pitchFamily="34" charset="-122"/>
                 <a:cs typeface="Times New Roman" pitchFamily="34" charset="-120"/>
               </a:rPr>
-              <a:t>Lesson 26: Problems of Waste Management</a:t>
+              <a:t>The Lagdo dam is on the ______ River.</a:t>
+            </a:r>
+            <a:endParaRPr lang="en-US" sz="4000" dirty="0"/>
+          </a:p>
+          <a:p>
+            <a:pPr algn="l" marL="342900" indent="-342900">
+              <a:spcAft>
+                <a:spcPts val="800"/>
+              </a:spcAft>
+              <a:buSzPct val="100000"/>
+              <a:buFont typeface="+mj-lt"/>
+              <a:buAutoNum type="arabicPeriod" startAt="1"/>
+            </a:pPr>
+            <a:r>
+              <a:rPr lang="en-US" sz="4000" dirty="0">
+                <a:solidFill>
+                  <a:srgbClr val="111111"/>
+                </a:solidFill>
+                <a:latin typeface="Times New Roman" pitchFamily="34" charset="0"/>
+                <a:ea typeface="Times New Roman" pitchFamily="34" charset="-122"/>
+                <a:cs typeface="Times New Roman" pitchFamily="34" charset="-120"/>
+              </a:rPr>
+              <a:t>The dam produces ______ for the North.</a:t>
+            </a:r>
+            <a:endParaRPr lang="en-US" sz="4000" dirty="0"/>
+          </a:p>
+          <a:p>
+            <a:pPr algn="l" marL="342900" indent="-342900">
+              <a:spcAft>
+                <a:spcPts val="800"/>
+              </a:spcAft>
+              <a:buSzPct val="100000"/>
+              <a:buFont typeface="+mj-lt"/>
+              <a:buAutoNum type="arabicPeriod" startAt="1"/>
+            </a:pPr>
+            <a:r>
+              <a:rPr lang="en-US" sz="4000" dirty="0">
+                <a:solidFill>
+                  <a:srgbClr val="111111"/>
+                </a:solidFill>
+                <a:latin typeface="Times New Roman" pitchFamily="34" charset="0"/>
+                <a:ea typeface="Times New Roman" pitchFamily="34" charset="-122"/>
+                <a:cs typeface="Times New Roman" pitchFamily="34" charset="-120"/>
+              </a:rPr>
+              <a:t>A dam on the Lom in the East is ______.</a:t>
             </a:r>
             <a:endParaRPr lang="en-US" sz="4000" dirty="0"/>
           </a:p>
@@ -16932,6 +17337,683 @@
                 <a:ea typeface="Calibri" pitchFamily="34" charset="-122"/>
                 <a:cs typeface="Calibri" pitchFamily="34" charset="-120"/>
               </a:rPr>
+              <a:t>HOMEWORK</a:t>
+            </a:r>
+            <a:endParaRPr lang="en-US" sz="1400" dirty="0"/>
+          </a:p>
+        </p:txBody>
+      </p:sp>
+      <p:pic>
+        <p:nvPicPr>
+          <p:cNvPr id="3" name="Image 0" descr="/home/claude/f4/img/minesec_sheet.png">    </p:cNvPr>
+          <p:cNvPicPr>
+            <a:picLocks noChangeAspect="1"/>
+          </p:cNvPicPr>
+          <p:nvPr/>
+        </p:nvPicPr>
+        <p:blipFill>
+          <a:blip r:embed="rId1"/>
+          <a:stretch>
+            <a:fillRect/>
+          </a:stretch>
+        </p:blipFill>
+        <p:spPr>
+          <a:xfrm>
+            <a:off x="0" y="658368"/>
+            <a:ext cx="5120640" cy="5833872"/>
+          </a:xfrm>
+          <a:prstGeom prst="rect">
+            <a:avLst/>
+          </a:prstGeom>
+        </p:spPr>
+      </p:pic>
+      <p:sp>
+        <p:nvSpPr>
+          <p:cNvPr id="4" name="Text 1"/>
+          <p:cNvSpPr/>
+          <p:nvPr/>
+        </p:nvSpPr>
+        <p:spPr>
+          <a:xfrm>
+            <a:off x="5349240" y="1005840"/>
+            <a:ext cx="6522415" cy="731520"/>
+          </a:xfrm>
+          <a:prstGeom prst="rect">
+            <a:avLst/>
+          </a:prstGeom>
+          <a:noFill/>
+          <a:ln/>
+        </p:spPr>
+        <p:txBody>
+          <a:bodyPr wrap="square" lIns="0" tIns="0" rIns="0" bIns="0" rtlCol="0" anchor="ctr">
+            <a:normAutofit/>
+          </a:bodyPr>
+          <a:lstStyle/>
+          <a:p>
+            <a:pPr algn="ctr" indent="0" marL="0">
+              <a:buNone/>
+            </a:pPr>
+            <a:r>
+              <a:rPr lang="en-US" sz="3600" b="1" dirty="0">
+                <a:solidFill>
+                  <a:srgbClr val="990011"/>
+                </a:solidFill>
+                <a:latin typeface="Times New Roman" pitchFamily="34" charset="0"/>
+                <a:ea typeface="Times New Roman" pitchFamily="34" charset="-122"/>
+                <a:cs typeface="Times New Roman" pitchFamily="34" charset="-120"/>
+              </a:rPr>
+              <a:t>Homework</a:t>
+            </a:r>
+            <a:endParaRPr lang="en-US" sz="3600" dirty="0"/>
+          </a:p>
+        </p:txBody>
+      </p:sp>
+      <p:sp>
+        <p:nvSpPr>
+          <p:cNvPr id="5" name="Text 2"/>
+          <p:cNvSpPr/>
+          <p:nvPr/>
+        </p:nvSpPr>
+        <p:spPr>
+          <a:xfrm>
+            <a:off x="5349240" y="1783080"/>
+            <a:ext cx="6522415" cy="4663440"/>
+          </a:xfrm>
+          <a:prstGeom prst="rect">
+            <a:avLst/>
+          </a:prstGeom>
+          <a:noFill/>
+          <a:ln/>
+        </p:spPr>
+        <p:txBody>
+          <a:bodyPr wrap="square" lIns="0" tIns="0" rIns="0" bIns="0" rtlCol="0" anchor="t"/>
+          <a:lstStyle/>
+          <a:p>
+            <a:pPr algn="l" indent="0" marL="0">
+              <a:spcAft>
+                <a:spcPts val="800"/>
+              </a:spcAft>
+              <a:buNone/>
+            </a:pPr>
+            <a:r>
+              <a:rPr lang="en-US" sz="4000" dirty="0">
+                <a:solidFill>
+                  <a:srgbClr val="111111"/>
+                </a:solidFill>
+                <a:latin typeface="Times New Roman" pitchFamily="34" charset="0"/>
+                <a:ea typeface="Times New Roman" pitchFamily="34" charset="-122"/>
+                <a:cs typeface="Times New Roman" pitchFamily="34" charset="-120"/>
+              </a:rPr>
+              <a:t>Explain how the Lagdo dam affects the life of the people of Garoua.</a:t>
+            </a:r>
+            <a:endParaRPr lang="en-US" sz="4000" dirty="0"/>
+          </a:p>
+        </p:txBody>
+      </p:sp>
+      <p:sp>
+        <p:nvSpPr>
+          <p:cNvPr id="25" name="Slide Number Placeholder 0"/>
+          <p:cNvSpPr>
+            <a:spLocks noGrp="1"/>
+          </p:cNvSpPr>
+          <p:nvPr>
+            <p:ph type="sldNum" sz="quarter" idx="4294967295"/>
+          </p:nvPr>
+        </p:nvSpPr>
+        <p:spPr>
+          <a:xfrm>
+            <a:off x="27432" y="91440"/>
+            <a:ext cx="585216" cy="475488"/>
+          </a:xfrm>
+          <a:prstGeom prst="rect">
+            <a:avLst/>
+          </a:prstGeom>
+          <a:extLst>
+            <a:ext uri="{C572A759-6A51-4108-AA02-DFA0A04FC94B}">
+              <ma14:wrappingTextBoxFlag xmlns:ma14="http://schemas.microsoft.com/office/mac/drawingml/2011/main" val="0"/>
+            </a:ext>
+          </a:extLst>
+        </p:spPr>
+        <p:txBody>
+          <a:bodyPr/>
+          <a:lstStyle>
+            <a:lvl1pPr>
+              <a:defRPr sz="2000">
+                <a:solidFill>
+                  <a:srgbClr val="FFFFFF"/>
+                </a:solidFill>
+                <a:latin typeface="Calibri"/>
+                <a:ea typeface="Calibri"/>
+                <a:cs typeface="Calibri"/>
+              </a:defRPr>
+            </a:lvl1pPr>
+          </a:lstStyle>
+          <a:p>
+            <a:pPr algn="ctr"/>
+            <a:fld id="{F7021451-1387-4CA6-816F-3879F97B5CBC}" type="slidenum">
+              <a:rPr b="1" lang="en-US"/>
+              <a:t>48</a:t>
+            </a:fld>
+            <a:endParaRPr lang="en-US"/>
+          </a:p>
+        </p:txBody>
+      </p:sp>
+    </p:spTree>
+  </p:cSld>
+  <p:clrMapOvr>
+    <a:masterClrMapping/>
+  </p:clrMapOvr>
+</p:sld>
+</file>
+
+<file path=ppt/slides/slide49.xml><?xml version="1.0" encoding="utf-8"?>
+<p:sld xmlns:a="http://schemas.openxmlformats.org/drawingml/2006/main" xmlns:r="http://schemas.openxmlformats.org/officeDocument/2006/relationships" xmlns:p="http://schemas.openxmlformats.org/presentationml/2006/main">
+  <p:cSld name="Slide 49">
+    <p:spTree>
+      <p:nvGrpSpPr>
+        <p:cNvPr id="1" name=""/>
+        <p:cNvGrpSpPr/>
+        <p:nvPr/>
+      </p:nvGrpSpPr>
+      <p:grpSpPr>
+        <a:xfrm>
+          <a:off x="0" y="0"/>
+          <a:ext cx="0" cy="0"/>
+          <a:chOff x="0" y="0"/>
+          <a:chExt cx="0" cy="0"/>
+        </a:xfrm>
+      </p:grpSpPr>
+      <p:sp>
+        <p:nvSpPr>
+          <p:cNvPr id="2" name="Text 0"/>
+          <p:cNvSpPr/>
+          <p:nvPr/>
+        </p:nvSpPr>
+        <p:spPr>
+          <a:xfrm>
+            <a:off x="457200" y="713232"/>
+            <a:ext cx="11368735" cy="274320"/>
+          </a:xfrm>
+          <a:prstGeom prst="rect">
+            <a:avLst/>
+          </a:prstGeom>
+          <a:noFill/>
+          <a:ln/>
+        </p:spPr>
+        <p:txBody>
+          <a:bodyPr wrap="square" lIns="0" tIns="0" rIns="0" bIns="0" rtlCol="0" anchor="ctr"/>
+          <a:lstStyle/>
+          <a:p>
+            <a:pPr algn="r" indent="0" marL="0">
+              <a:buNone/>
+            </a:pPr>
+            <a:r>
+              <a:rPr lang="en-US" sz="1400" b="1" dirty="0">
+                <a:solidFill>
+                  <a:srgbClr val="1C3F6E"/>
+                </a:solidFill>
+                <a:latin typeface="Calibri" pitchFamily="34" charset="0"/>
+                <a:ea typeface="Calibri" pitchFamily="34" charset="-122"/>
+                <a:cs typeface="Calibri" pitchFamily="34" charset="-120"/>
+              </a:rPr>
+              <a:t>NEXT LESSON</a:t>
+            </a:r>
+            <a:endParaRPr lang="en-US" sz="1400" dirty="0"/>
+          </a:p>
+        </p:txBody>
+      </p:sp>
+      <p:pic>
+        <p:nvPicPr>
+          <p:cNvPr id="3" name="Image 0" descr="/home/claude/f4/img/minesec_sheet.png">    </p:cNvPr>
+          <p:cNvPicPr>
+            <a:picLocks noChangeAspect="1"/>
+          </p:cNvPicPr>
+          <p:nvPr/>
+        </p:nvPicPr>
+        <p:blipFill>
+          <a:blip r:embed="rId1"/>
+          <a:stretch>
+            <a:fillRect/>
+          </a:stretch>
+        </p:blipFill>
+        <p:spPr>
+          <a:xfrm>
+            <a:off x="0" y="658368"/>
+            <a:ext cx="5120640" cy="5833872"/>
+          </a:xfrm>
+          <a:prstGeom prst="rect">
+            <a:avLst/>
+          </a:prstGeom>
+        </p:spPr>
+      </p:pic>
+      <p:sp>
+        <p:nvSpPr>
+          <p:cNvPr id="4" name="Text 1"/>
+          <p:cNvSpPr/>
+          <p:nvPr/>
+        </p:nvSpPr>
+        <p:spPr>
+          <a:xfrm>
+            <a:off x="5349240" y="1005840"/>
+            <a:ext cx="6522415" cy="731520"/>
+          </a:xfrm>
+          <a:prstGeom prst="rect">
+            <a:avLst/>
+          </a:prstGeom>
+          <a:noFill/>
+          <a:ln/>
+        </p:spPr>
+        <p:txBody>
+          <a:bodyPr wrap="square" lIns="0" tIns="0" rIns="0" bIns="0" rtlCol="0" anchor="ctr">
+            <a:normAutofit/>
+          </a:bodyPr>
+          <a:lstStyle/>
+          <a:p>
+            <a:pPr algn="ctr" indent="0" marL="0">
+              <a:buNone/>
+            </a:pPr>
+            <a:r>
+              <a:rPr lang="en-US" sz="3600" b="1" dirty="0">
+                <a:solidFill>
+                  <a:srgbClr val="990011"/>
+                </a:solidFill>
+                <a:latin typeface="Times New Roman" pitchFamily="34" charset="0"/>
+                <a:ea typeface="Times New Roman" pitchFamily="34" charset="-122"/>
+                <a:cs typeface="Times New Roman" pitchFamily="34" charset="-120"/>
+              </a:rPr>
+              <a:t>Next Lesson</a:t>
+            </a:r>
+            <a:endParaRPr lang="en-US" sz="3600" dirty="0"/>
+          </a:p>
+        </p:txBody>
+      </p:sp>
+      <p:sp>
+        <p:nvSpPr>
+          <p:cNvPr id="5" name="Text 2"/>
+          <p:cNvSpPr/>
+          <p:nvPr/>
+        </p:nvSpPr>
+        <p:spPr>
+          <a:xfrm>
+            <a:off x="5349240" y="1783080"/>
+            <a:ext cx="6522415" cy="4663440"/>
+          </a:xfrm>
+          <a:prstGeom prst="rect">
+            <a:avLst/>
+          </a:prstGeom>
+          <a:noFill/>
+          <a:ln/>
+        </p:spPr>
+        <p:txBody>
+          <a:bodyPr wrap="square" lIns="0" tIns="0" rIns="0" bIns="0" rtlCol="0" anchor="ctr"/>
+          <a:lstStyle/>
+          <a:p>
+            <a:pPr algn="ctr" indent="0" marL="0">
+              <a:spcAft>
+                <a:spcPts val="800"/>
+              </a:spcAft>
+              <a:buNone/>
+            </a:pPr>
+            <a:r>
+              <a:rPr lang="en-US" sz="4000" b="1" dirty="0">
+                <a:solidFill>
+                  <a:srgbClr val="111111"/>
+                </a:solidFill>
+                <a:latin typeface="Times New Roman" pitchFamily="34" charset="0"/>
+                <a:ea typeface="Times New Roman" pitchFamily="34" charset="-122"/>
+                <a:cs typeface="Times New Roman" pitchFamily="34" charset="-120"/>
+              </a:rPr>
+              <a:t>Our next lesson will be on:</a:t>
+            </a:r>
+            <a:endParaRPr lang="en-US" sz="4000" dirty="0"/>
+          </a:p>
+          <a:p>
+            <a:pPr algn="ctr" indent="0" marL="0">
+              <a:spcAft>
+                <a:spcPts val="800"/>
+              </a:spcAft>
+              <a:buNone/>
+            </a:pPr>
+            <a:r>
+              <a:rPr lang="en-US" sz="4000" b="1" dirty="0">
+                <a:solidFill>
+                  <a:srgbClr val="990011"/>
+                </a:solidFill>
+                <a:latin typeface="Times New Roman" pitchFamily="34" charset="0"/>
+                <a:ea typeface="Times New Roman" pitchFamily="34" charset="-122"/>
+                <a:cs typeface="Times New Roman" pitchFamily="34" charset="-120"/>
+              </a:rPr>
+              <a:t>Lesson 26: Problems of Waste Management</a:t>
+            </a:r>
+            <a:endParaRPr lang="en-US" sz="4000" dirty="0"/>
+          </a:p>
+        </p:txBody>
+      </p:sp>
+      <p:sp>
+        <p:nvSpPr>
+          <p:cNvPr id="25" name="Slide Number Placeholder 0"/>
+          <p:cNvSpPr>
+            <a:spLocks noGrp="1"/>
+          </p:cNvSpPr>
+          <p:nvPr>
+            <p:ph type="sldNum" sz="quarter" idx="4294967295"/>
+          </p:nvPr>
+        </p:nvSpPr>
+        <p:spPr>
+          <a:xfrm>
+            <a:off x="27432" y="91440"/>
+            <a:ext cx="585216" cy="475488"/>
+          </a:xfrm>
+          <a:prstGeom prst="rect">
+            <a:avLst/>
+          </a:prstGeom>
+          <a:extLst>
+            <a:ext uri="{C572A759-6A51-4108-AA02-DFA0A04FC94B}">
+              <ma14:wrappingTextBoxFlag xmlns:ma14="http://schemas.microsoft.com/office/mac/drawingml/2011/main" val="0"/>
+            </a:ext>
+          </a:extLst>
+        </p:spPr>
+        <p:txBody>
+          <a:bodyPr/>
+          <a:lstStyle>
+            <a:lvl1pPr>
+              <a:defRPr sz="2000">
+                <a:solidFill>
+                  <a:srgbClr val="FFFFFF"/>
+                </a:solidFill>
+                <a:latin typeface="Calibri"/>
+                <a:ea typeface="Calibri"/>
+                <a:cs typeface="Calibri"/>
+              </a:defRPr>
+            </a:lvl1pPr>
+          </a:lstStyle>
+          <a:p>
+            <a:pPr algn="ctr"/>
+            <a:fld id="{F7021451-1387-4CA6-816F-3879F97B5CBC}" type="slidenum">
+              <a:rPr b="1" lang="en-US"/>
+              <a:t>49</a:t>
+            </a:fld>
+            <a:endParaRPr lang="en-US"/>
+          </a:p>
+        </p:txBody>
+      </p:sp>
+    </p:spTree>
+  </p:cSld>
+  <p:clrMapOvr>
+    <a:masterClrMapping/>
+  </p:clrMapOvr>
+</p:sld>
+</file>
+
+<file path=ppt/slides/slide5.xml><?xml version="1.0" encoding="utf-8"?>
+<p:sld xmlns:a="http://schemas.openxmlformats.org/drawingml/2006/main" xmlns:r="http://schemas.openxmlformats.org/officeDocument/2006/relationships" xmlns:p="http://schemas.openxmlformats.org/presentationml/2006/main">
+  <p:cSld name="Slide 5">
+    <p:spTree>
+      <p:nvGrpSpPr>
+        <p:cNvPr id="1" name=""/>
+        <p:cNvGrpSpPr/>
+        <p:nvPr/>
+      </p:nvGrpSpPr>
+      <p:grpSpPr>
+        <a:xfrm>
+          <a:off x="0" y="0"/>
+          <a:ext cx="0" cy="0"/>
+          <a:chOff x="0" y="0"/>
+          <a:chExt cx="0" cy="0"/>
+        </a:xfrm>
+      </p:grpSpPr>
+      <p:sp>
+        <p:nvSpPr>
+          <p:cNvPr id="2" name="Text 0"/>
+          <p:cNvSpPr/>
+          <p:nvPr/>
+        </p:nvSpPr>
+        <p:spPr>
+          <a:xfrm>
+            <a:off x="457200" y="713232"/>
+            <a:ext cx="11368735" cy="274320"/>
+          </a:xfrm>
+          <a:prstGeom prst="rect">
+            <a:avLst/>
+          </a:prstGeom>
+          <a:noFill/>
+          <a:ln/>
+        </p:spPr>
+        <p:txBody>
+          <a:bodyPr wrap="square" lIns="0" tIns="0" rIns="0" bIns="0" rtlCol="0" anchor="ctr"/>
+          <a:lstStyle/>
+          <a:p>
+            <a:pPr algn="r" indent="0" marL="0">
+              <a:buNone/>
+            </a:pPr>
+            <a:r>
+              <a:rPr lang="en-US" sz="1400" b="1" dirty="0">
+                <a:solidFill>
+                  <a:srgbClr val="1C3F6E"/>
+                </a:solidFill>
+                <a:latin typeface="Calibri" pitchFamily="34" charset="0"/>
+                <a:ea typeface="Calibri" pitchFamily="34" charset="-122"/>
+                <a:cs typeface="Calibri" pitchFamily="34" charset="-120"/>
+              </a:rPr>
+              <a:t>HOMEWORK CORRECTION</a:t>
+            </a:r>
+            <a:endParaRPr lang="en-US" sz="1400" dirty="0"/>
+          </a:p>
+        </p:txBody>
+      </p:sp>
+      <p:pic>
+        <p:nvPicPr>
+          <p:cNvPr id="3" name="Image 0" descr="/home/claude/f4/img/minesec_sheet.png">    </p:cNvPr>
+          <p:cNvPicPr>
+            <a:picLocks noChangeAspect="1"/>
+          </p:cNvPicPr>
+          <p:nvPr/>
+        </p:nvPicPr>
+        <p:blipFill>
+          <a:blip r:embed="rId1"/>
+          <a:stretch>
+            <a:fillRect/>
+          </a:stretch>
+        </p:blipFill>
+        <p:spPr>
+          <a:xfrm>
+            <a:off x="0" y="658368"/>
+            <a:ext cx="5120640" cy="5833872"/>
+          </a:xfrm>
+          <a:prstGeom prst="rect">
+            <a:avLst/>
+          </a:prstGeom>
+        </p:spPr>
+      </p:pic>
+      <p:sp>
+        <p:nvSpPr>
+          <p:cNvPr id="4" name="Text 1"/>
+          <p:cNvSpPr/>
+          <p:nvPr/>
+        </p:nvSpPr>
+        <p:spPr>
+          <a:xfrm>
+            <a:off x="5349240" y="1005840"/>
+            <a:ext cx="6522415" cy="731520"/>
+          </a:xfrm>
+          <a:prstGeom prst="rect">
+            <a:avLst/>
+          </a:prstGeom>
+          <a:noFill/>
+          <a:ln/>
+        </p:spPr>
+        <p:txBody>
+          <a:bodyPr wrap="square" lIns="0" tIns="0" rIns="0" bIns="0" rtlCol="0" anchor="ctr">
+            <a:normAutofit/>
+          </a:bodyPr>
+          <a:lstStyle/>
+          <a:p>
+            <a:pPr algn="ctr" indent="0" marL="0">
+              <a:buNone/>
+            </a:pPr>
+            <a:r>
+              <a:rPr lang="en-US" sz="3600" b="1" dirty="0">
+                <a:solidFill>
+                  <a:srgbClr val="990011"/>
+                </a:solidFill>
+                <a:latin typeface="Times New Roman" pitchFamily="34" charset="0"/>
+                <a:ea typeface="Times New Roman" pitchFamily="34" charset="-122"/>
+                <a:cs typeface="Times New Roman" pitchFamily="34" charset="-120"/>
+              </a:rPr>
+              <a:t>Correction: Possible Answer</a:t>
+            </a:r>
+            <a:endParaRPr lang="en-US" sz="3600" dirty="0"/>
+          </a:p>
+        </p:txBody>
+      </p:sp>
+      <p:sp>
+        <p:nvSpPr>
+          <p:cNvPr id="5" name="Text 2"/>
+          <p:cNvSpPr/>
+          <p:nvPr/>
+        </p:nvSpPr>
+        <p:spPr>
+          <a:xfrm>
+            <a:off x="5349240" y="1783080"/>
+            <a:ext cx="6522415" cy="4663440"/>
+          </a:xfrm>
+          <a:prstGeom prst="rect">
+            <a:avLst/>
+          </a:prstGeom>
+          <a:noFill/>
+          <a:ln/>
+        </p:spPr>
+        <p:txBody>
+          <a:bodyPr wrap="square" lIns="0" tIns="0" rIns="0" bIns="0" rtlCol="0" anchor="t"/>
+          <a:lstStyle/>
+          <a:p>
+            <a:pPr algn="l" indent="0" marL="0">
+              <a:spcAft>
+                <a:spcPts val="800"/>
+              </a:spcAft>
+              <a:buNone/>
+            </a:pPr>
+            <a:r>
+              <a:rPr lang="en-US" sz="4000" dirty="0">
+                <a:solidFill>
+                  <a:srgbClr val="111111"/>
+                </a:solidFill>
+                <a:latin typeface="Times New Roman" pitchFamily="34" charset="0"/>
+                <a:ea typeface="Times New Roman" pitchFamily="34" charset="-122"/>
+                <a:cs typeface="Times New Roman" pitchFamily="34" charset="-120"/>
+              </a:rPr>
+              <a:t>A central box (multipurpose dam) with arrows to hydro-electricity, irrigation, navigation, flood control, water supply, fishing and tourism.</a:t>
+            </a:r>
+            <a:endParaRPr lang="en-US" sz="4000" dirty="0"/>
+          </a:p>
+        </p:txBody>
+      </p:sp>
+      <p:sp>
+        <p:nvSpPr>
+          <p:cNvPr id="25" name="Slide Number Placeholder 0"/>
+          <p:cNvSpPr>
+            <a:spLocks noGrp="1"/>
+          </p:cNvSpPr>
+          <p:nvPr>
+            <p:ph type="sldNum" sz="quarter" idx="4294967295"/>
+          </p:nvPr>
+        </p:nvSpPr>
+        <p:spPr>
+          <a:xfrm>
+            <a:off x="27432" y="91440"/>
+            <a:ext cx="585216" cy="475488"/>
+          </a:xfrm>
+          <a:prstGeom prst="rect">
+            <a:avLst/>
+          </a:prstGeom>
+          <a:extLst>
+            <a:ext uri="{C572A759-6A51-4108-AA02-DFA0A04FC94B}">
+              <ma14:wrappingTextBoxFlag xmlns:ma14="http://schemas.microsoft.com/office/mac/drawingml/2011/main" val="0"/>
+            </a:ext>
+          </a:extLst>
+        </p:spPr>
+        <p:txBody>
+          <a:bodyPr/>
+          <a:lstStyle>
+            <a:lvl1pPr>
+              <a:defRPr sz="2000">
+                <a:solidFill>
+                  <a:srgbClr val="FFFFFF"/>
+                </a:solidFill>
+                <a:latin typeface="Calibri"/>
+                <a:ea typeface="Calibri"/>
+                <a:cs typeface="Calibri"/>
+              </a:defRPr>
+            </a:lvl1pPr>
+          </a:lstStyle>
+          <a:p>
+            <a:pPr algn="ctr"/>
+            <a:fld id="{F7021451-1387-4CA6-816F-3879F97B5CBC}" type="slidenum">
+              <a:rPr b="1" lang="en-US"/>
+              <a:t>5</a:t>
+            </a:fld>
+            <a:endParaRPr lang="en-US"/>
+          </a:p>
+        </p:txBody>
+      </p:sp>
+    </p:spTree>
+  </p:cSld>
+  <p:clrMapOvr>
+    <a:masterClrMapping/>
+  </p:clrMapOvr>
+</p:sld>
+</file>
+
+<file path=ppt/slides/slide50.xml><?xml version="1.0" encoding="utf-8"?>
+<p:sld xmlns:a="http://schemas.openxmlformats.org/drawingml/2006/main" xmlns:r="http://schemas.openxmlformats.org/officeDocument/2006/relationships" xmlns:p="http://schemas.openxmlformats.org/presentationml/2006/main">
+  <p:cSld name="Slide 50">
+    <p:spTree>
+      <p:nvGrpSpPr>
+        <p:cNvPr id="1" name=""/>
+        <p:cNvGrpSpPr/>
+        <p:nvPr/>
+      </p:nvGrpSpPr>
+      <p:grpSpPr>
+        <a:xfrm>
+          <a:off x="0" y="0"/>
+          <a:ext cx="0" cy="0"/>
+          <a:chOff x="0" y="0"/>
+          <a:chExt cx="0" cy="0"/>
+        </a:xfrm>
+      </p:grpSpPr>
+      <p:sp>
+        <p:nvSpPr>
+          <p:cNvPr id="2" name="Text 0"/>
+          <p:cNvSpPr/>
+          <p:nvPr/>
+        </p:nvSpPr>
+        <p:spPr>
+          <a:xfrm>
+            <a:off x="457200" y="713232"/>
+            <a:ext cx="11368735" cy="274320"/>
+          </a:xfrm>
+          <a:prstGeom prst="rect">
+            <a:avLst/>
+          </a:prstGeom>
+          <a:noFill/>
+          <a:ln/>
+        </p:spPr>
+        <p:txBody>
+          <a:bodyPr wrap="square" lIns="0" tIns="0" rIns="0" bIns="0" rtlCol="0" anchor="ctr"/>
+          <a:lstStyle/>
+          <a:p>
+            <a:pPr algn="r" indent="0" marL="0">
+              <a:buNone/>
+            </a:pPr>
+            <a:r>
+              <a:rPr lang="en-US" sz="1400" b="1" dirty="0">
+                <a:solidFill>
+                  <a:srgbClr val="1C3F6E"/>
+                </a:solidFill>
+                <a:latin typeface="Calibri" pitchFamily="34" charset="0"/>
+                <a:ea typeface="Calibri" pitchFamily="34" charset="-122"/>
+                <a:cs typeface="Calibri" pitchFamily="34" charset="-120"/>
+              </a:rPr>
               <a:t>BILINGUAL GAME</a:t>
             </a:r>
             <a:endParaRPr lang="en-US" sz="1400" dirty="0"/>
@@ -16979,7 +18061,7 @@
       </p:sp>
       <p:graphicFrame>
         <p:nvGraphicFramePr>
-          <p:cNvPr id="49" name="Table 0"/>
+          <p:cNvPr id="51" name="Table 0"/>
           <p:cNvGraphicFramePr>
             <a:graphicFrameLocks noGrp="1"/>
           </p:cNvGraphicFramePr>
@@ -18015,7 +19097,7 @@
             <a:pPr algn="ctr"/>
             <a:fld id="{F7021451-1387-4CA6-816F-3879F97B5CBC}" type="slidenum">
               <a:rPr b="1" lang="en-US"/>
-              <a:t>48</a:t>
+              <a:t>50</a:t>
             </a:fld>
             <a:endParaRPr lang="en-US"/>
           </a:p>
@@ -18029,9 +19111,9 @@
 </p:sld>
 </file>
 
-<file path=ppt/slides/slide49.xml><?xml version="1.0" encoding="utf-8"?>
+<file path=ppt/slides/slide51.xml><?xml version="1.0" encoding="utf-8"?>
 <p:sld xmlns:a="http://schemas.openxmlformats.org/drawingml/2006/main" xmlns:r="http://schemas.openxmlformats.org/officeDocument/2006/relationships" xmlns:p="http://schemas.openxmlformats.org/presentationml/2006/main">
-  <p:cSld name="Slide 49">
+  <p:cSld name="Slide 51">
     <p:spTree>
       <p:nvGrpSpPr>
         <p:cNvPr id="1" name=""/>
@@ -18126,7 +19208,7 @@
       </p:sp>
       <p:graphicFrame>
         <p:nvGraphicFramePr>
-          <p:cNvPr id="50" name="Table 0"/>
+          <p:cNvPr id="52" name="Table 0"/>
           <p:cNvGraphicFramePr>
             <a:graphicFrameLocks noGrp="1"/>
           </p:cNvGraphicFramePr>
@@ -18748,7 +19830,7 @@
             <a:pPr algn="ctr"/>
             <a:fld id="{F7021451-1387-4CA6-816F-3879F97B5CBC}" type="slidenum">
               <a:rPr b="1" lang="en-US"/>
-              <a:t>49</a:t>
+              <a:t>51</a:t>
             </a:fld>
             <a:endParaRPr lang="en-US"/>
           </a:p>
@@ -18762,9 +19844,9 @@
 </p:sld>
 </file>
 
-<file path=ppt/slides/slide5.xml><?xml version="1.0" encoding="utf-8"?>
+<file path=ppt/slides/slide52.xml><?xml version="1.0" encoding="utf-8"?>
 <p:sld xmlns:a="http://schemas.openxmlformats.org/drawingml/2006/main" xmlns:r="http://schemas.openxmlformats.org/officeDocument/2006/relationships" xmlns:p="http://schemas.openxmlformats.org/presentationml/2006/main">
-  <p:cSld name="Slide 5">
+  <p:cSld name="Slide 52">
     <p:spTree>
       <p:nvGrpSpPr>
         <p:cNvPr id="1" name=""/>
@@ -18812,225 +19894,6 @@
                 <a:ea typeface="Calibri" pitchFamily="34" charset="-122"/>
                 <a:cs typeface="Calibri" pitchFamily="34" charset="-120"/>
               </a:rPr>
-              <a:t>HOMEWORK CORRECTION</a:t>
-            </a:r>
-            <a:endParaRPr lang="en-US" sz="1400" dirty="0"/>
-          </a:p>
-        </p:txBody>
-      </p:sp>
-      <p:pic>
-        <p:nvPicPr>
-          <p:cNvPr id="3" name="Image 0" descr="/home/claude/f4/img/minesec_sheet.png">    </p:cNvPr>
-          <p:cNvPicPr>
-            <a:picLocks noChangeAspect="1"/>
-          </p:cNvPicPr>
-          <p:nvPr/>
-        </p:nvPicPr>
-        <p:blipFill>
-          <a:blip r:embed="rId1"/>
-          <a:stretch>
-            <a:fillRect/>
-          </a:stretch>
-        </p:blipFill>
-        <p:spPr>
-          <a:xfrm>
-            <a:off x="0" y="658368"/>
-            <a:ext cx="5120640" cy="5833872"/>
-          </a:xfrm>
-          <a:prstGeom prst="rect">
-            <a:avLst/>
-          </a:prstGeom>
-        </p:spPr>
-      </p:pic>
-      <p:sp>
-        <p:nvSpPr>
-          <p:cNvPr id="4" name="Text 1"/>
-          <p:cNvSpPr/>
-          <p:nvPr/>
-        </p:nvSpPr>
-        <p:spPr>
-          <a:xfrm>
-            <a:off x="5349240" y="1005840"/>
-            <a:ext cx="6522415" cy="731520"/>
-          </a:xfrm>
-          <a:prstGeom prst="rect">
-            <a:avLst/>
-          </a:prstGeom>
-          <a:noFill/>
-          <a:ln/>
-        </p:spPr>
-        <p:txBody>
-          <a:bodyPr wrap="square" lIns="0" tIns="0" rIns="0" bIns="0" rtlCol="0" anchor="ctr">
-            <a:normAutofit/>
-          </a:bodyPr>
-          <a:lstStyle/>
-          <a:p>
-            <a:pPr algn="ctr" indent="0" marL="0">
-              <a:buNone/>
-            </a:pPr>
-            <a:r>
-              <a:rPr lang="en-US" sz="3600" b="1" dirty="0">
-                <a:solidFill>
-                  <a:srgbClr val="990011"/>
-                </a:solidFill>
-                <a:latin typeface="Times New Roman" pitchFamily="34" charset="0"/>
-                <a:ea typeface="Times New Roman" pitchFamily="34" charset="-122"/>
-                <a:cs typeface="Times New Roman" pitchFamily="34" charset="-120"/>
-              </a:rPr>
-              <a:t>Correction: Possible Answer</a:t>
-            </a:r>
-            <a:endParaRPr lang="en-US" sz="3600" dirty="0"/>
-          </a:p>
-        </p:txBody>
-      </p:sp>
-      <p:sp>
-        <p:nvSpPr>
-          <p:cNvPr id="5" name="Text 2"/>
-          <p:cNvSpPr/>
-          <p:nvPr/>
-        </p:nvSpPr>
-        <p:spPr>
-          <a:xfrm>
-            <a:off x="5349240" y="1783080"/>
-            <a:ext cx="6522415" cy="4663440"/>
-          </a:xfrm>
-          <a:prstGeom prst="rect">
-            <a:avLst/>
-          </a:prstGeom>
-          <a:noFill/>
-          <a:ln/>
-        </p:spPr>
-        <p:txBody>
-          <a:bodyPr wrap="square" lIns="0" tIns="0" rIns="0" bIns="0" rtlCol="0" anchor="t"/>
-          <a:lstStyle/>
-          <a:p>
-            <a:pPr algn="l" indent="0" marL="0">
-              <a:spcAft>
-                <a:spcPts val="800"/>
-              </a:spcAft>
-              <a:buNone/>
-            </a:pPr>
-            <a:r>
-              <a:rPr lang="en-US" sz="4000" dirty="0">
-                <a:solidFill>
-                  <a:srgbClr val="111111"/>
-                </a:solidFill>
-                <a:latin typeface="Times New Roman" pitchFamily="34" charset="0"/>
-                <a:ea typeface="Times New Roman" pitchFamily="34" charset="-122"/>
-                <a:cs typeface="Times New Roman" pitchFamily="34" charset="-120"/>
-              </a:rPr>
-              <a:t>A central box (multipurpose dam) with arrows to hydro-electricity, irrigation, navigation, flood control, water supply, fishing and tourism.</a:t>
-            </a:r>
-            <a:endParaRPr lang="en-US" sz="4000" dirty="0"/>
-          </a:p>
-        </p:txBody>
-      </p:sp>
-      <p:sp>
-        <p:nvSpPr>
-          <p:cNvPr id="25" name="Slide Number Placeholder 0"/>
-          <p:cNvSpPr>
-            <a:spLocks noGrp="1"/>
-          </p:cNvSpPr>
-          <p:nvPr>
-            <p:ph type="sldNum" sz="quarter" idx="4294967295"/>
-          </p:nvPr>
-        </p:nvSpPr>
-        <p:spPr>
-          <a:xfrm>
-            <a:off x="27432" y="91440"/>
-            <a:ext cx="585216" cy="475488"/>
-          </a:xfrm>
-          <a:prstGeom prst="rect">
-            <a:avLst/>
-          </a:prstGeom>
-          <a:extLst>
-            <a:ext uri="{C572A759-6A51-4108-AA02-DFA0A04FC94B}">
-              <ma14:wrappingTextBoxFlag xmlns:ma14="http://schemas.microsoft.com/office/mac/drawingml/2011/main" val="0"/>
-            </a:ext>
-          </a:extLst>
-        </p:spPr>
-        <p:txBody>
-          <a:bodyPr/>
-          <a:lstStyle>
-            <a:lvl1pPr>
-              <a:defRPr sz="2000">
-                <a:solidFill>
-                  <a:srgbClr val="FFFFFF"/>
-                </a:solidFill>
-                <a:latin typeface="Calibri"/>
-                <a:ea typeface="Calibri"/>
-                <a:cs typeface="Calibri"/>
-              </a:defRPr>
-            </a:lvl1pPr>
-          </a:lstStyle>
-          <a:p>
-            <a:pPr algn="ctr"/>
-            <a:fld id="{F7021451-1387-4CA6-816F-3879F97B5CBC}" type="slidenum">
-              <a:rPr b="1" lang="en-US"/>
-              <a:t>5</a:t>
-            </a:fld>
-            <a:endParaRPr lang="en-US"/>
-          </a:p>
-        </p:txBody>
-      </p:sp>
-    </p:spTree>
-  </p:cSld>
-  <p:clrMapOvr>
-    <a:masterClrMapping/>
-  </p:clrMapOvr>
-</p:sld>
-</file>
-
-<file path=ppt/slides/slide50.xml><?xml version="1.0" encoding="utf-8"?>
-<p:sld xmlns:a="http://schemas.openxmlformats.org/drawingml/2006/main" xmlns:r="http://schemas.openxmlformats.org/officeDocument/2006/relationships" xmlns:p="http://schemas.openxmlformats.org/presentationml/2006/main">
-  <p:cSld name="Slide 50">
-    <p:spTree>
-      <p:nvGrpSpPr>
-        <p:cNvPr id="1" name=""/>
-        <p:cNvGrpSpPr/>
-        <p:nvPr/>
-      </p:nvGrpSpPr>
-      <p:grpSpPr>
-        <a:xfrm>
-          <a:off x="0" y="0"/>
-          <a:ext cx="0" cy="0"/>
-          <a:chOff x="0" y="0"/>
-          <a:chExt cx="0" cy="0"/>
-        </a:xfrm>
-      </p:grpSpPr>
-      <p:sp>
-        <p:nvSpPr>
-          <p:cNvPr id="2" name="Text 0"/>
-          <p:cNvSpPr/>
-          <p:nvPr/>
-        </p:nvSpPr>
-        <p:spPr>
-          <a:xfrm>
-            <a:off x="457200" y="713232"/>
-            <a:ext cx="11368735" cy="274320"/>
-          </a:xfrm>
-          <a:prstGeom prst="rect">
-            <a:avLst/>
-          </a:prstGeom>
-          <a:noFill/>
-          <a:ln/>
-        </p:spPr>
-        <p:txBody>
-          <a:bodyPr wrap="square" lIns="0" tIns="0" rIns="0" bIns="0" rtlCol="0" anchor="ctr"/>
-          <a:lstStyle/>
-          <a:p>
-            <a:pPr algn="r" indent="0" marL="0">
-              <a:buNone/>
-            </a:pPr>
-            <a:r>
-              <a:rPr lang="en-US" sz="1400" b="1" dirty="0">
-                <a:solidFill>
-                  <a:srgbClr val="1C3F6E"/>
-                </a:solidFill>
-                <a:latin typeface="Calibri" pitchFamily="34" charset="0"/>
-                <a:ea typeface="Calibri" pitchFamily="34" charset="-122"/>
-                <a:cs typeface="Calibri" pitchFamily="34" charset="-120"/>
-              </a:rPr>
               <a:t>LOGBOOK</a:t>
             </a:r>
             <a:endParaRPr lang="en-US" sz="1400" dirty="0"/>
@@ -19078,7 +19941,7 @@
       </p:sp>
       <p:graphicFrame>
         <p:nvGraphicFramePr>
-          <p:cNvPr id="51" name="Table 0"/>
+          <p:cNvPr id="53" name="Table 0"/>
           <p:cNvGraphicFramePr>
             <a:graphicFrameLocks noGrp="1"/>
           </p:cNvGraphicFramePr>
@@ -19188,7 +20051,7 @@
                           <a:ea typeface="Calibri" pitchFamily="34" charset="-122"/>
                           <a:cs typeface="Calibri" pitchFamily="34" charset="-120"/>
                         </a:rPr>
-                        <a:t>Objectives of the Lagdo Project; Achievements; Problems and Attempted Solutions.</a:t>
+                        <a:t>Objectives of the Lagdo Project; Achievements; Problems; Attempted Solutions.</a:t>
                       </a:r>
                       <a:endParaRPr lang="en-US" sz="1600" dirty="0">
                         <a:latin typeface="Calibri" charset="0"/>
@@ -19838,7 +20701,7 @@
             <a:pPr algn="ctr"/>
             <a:fld id="{F7021451-1387-4CA6-816F-3879F97B5CBC}" type="slidenum">
               <a:rPr b="1" lang="en-US"/>
-              <a:t>50</a:t>
+              <a:t>52</a:t>
             </a:fld>
             <a:endParaRPr lang="en-US"/>
           </a:p>
@@ -19852,9 +20715,9 @@
 </p:sld>
 </file>
 
-<file path=ppt/slides/slide51.xml><?xml version="1.0" encoding="utf-8"?>
+<file path=ppt/slides/slide53.xml><?xml version="1.0" encoding="utf-8"?>
 <p:sld xmlns:a="http://schemas.openxmlformats.org/drawingml/2006/main" xmlns:r="http://schemas.openxmlformats.org/officeDocument/2006/relationships" xmlns:p="http://schemas.openxmlformats.org/presentationml/2006/main">
-  <p:cSld name="Slide 51">
+  <p:cSld name="Slide 53">
     <p:spTree>
       <p:nvGrpSpPr>
         <p:cNvPr id="1" name=""/>
@@ -20163,7 +21026,7 @@
             <a:pPr algn="ctr"/>
             <a:fld id="{F7021451-1387-4CA6-816F-3879F97B5CBC}" type="slidenum">
               <a:rPr b="1" lang="en-US"/>
-              <a:t>51</a:t>
+              <a:t>53</a:t>
             </a:fld>
             <a:endParaRPr lang="en-US"/>
           </a:p>
@@ -20177,9 +21040,9 @@
 </p:sld>
 </file>
 
-<file path=ppt/slides/slide52.xml><?xml version="1.0" encoding="utf-8"?>
+<file path=ppt/slides/slide54.xml><?xml version="1.0" encoding="utf-8"?>
 <p:sld xmlns:a="http://schemas.openxmlformats.org/drawingml/2006/main" xmlns:r="http://schemas.openxmlformats.org/officeDocument/2006/relationships" xmlns:p="http://schemas.openxmlformats.org/presentationml/2006/main">
-  <p:cSld name="Slide 52">
+  <p:cSld name="Slide 54">
     <p:spTree>
       <p:nvGrpSpPr>
         <p:cNvPr id="1" name=""/>
@@ -20467,7 +21330,7 @@
             <a:pPr algn="ctr"/>
             <a:fld id="{F7021451-1387-4CA6-816F-3879F97B5CBC}" type="slidenum">
               <a:rPr b="1" lang="en-US"/>
-              <a:t>52</a:t>
+              <a:t>54</a:t>
             </a:fld>
             <a:endParaRPr lang="en-US"/>
           </a:p>
